--- a/assets/powerpoints/module-restaurant/D2-au-terminal.pptx
+++ b/assets/powerpoints/module-restaurant/D2-au-terminal.pptx
@@ -11124,7 +11124,25 @@
                 </a:solidFill>
                 <a:latin typeface="Verdana"/>
               </a:rPr>
-              <a:t>Les pourcentages proposés sont souvent calculés &lt;b&gt;après&lt;/b&gt; taxes, ce qui donne un montant plus élevé que 15 % du montant avant taxes. « Autre montant » permet d'entrer exactement ce qu'on veut — et personne ne le voit.</a:t>
+              <a:t>Les pourcentages proposés sont souvent calculés </a:t>
+            </a:r>
+            <a:r>
+              <a:rPr sz="2000" b="1" i="0">
+                <a:solidFill>
+                  <a:srgbClr val="4B4F52"/>
+                </a:solidFill>
+                <a:latin typeface="Verdana"/>
+              </a:rPr>
+              <a:t>après</a:t>
+            </a:r>
+            <a:r>
+              <a:rPr sz="2000" b="0" i="0">
+                <a:solidFill>
+                  <a:srgbClr val="4B4F52"/>
+                </a:solidFill>
+                <a:latin typeface="Verdana"/>
+              </a:rPr>
+              <a:t> taxes, ce qui donne un montant plus élevé que 15 % du montant avant taxes. « Autre montant » permet d'entrer exactement ce qu'on veut — et personne ne le voit.</a:t>
             </a:r>
           </a:p>
         </p:txBody>
